--- a/DecisionRandomizer1.pptx
+++ b/DecisionRandomizer1.pptx
@@ -2,10 +2,10 @@
 <file path=ppt/presentation.xml><?xml version="1.0" encoding="utf-8"?>
 <p:presentation xmlns:a="http://schemas.openxmlformats.org/drawingml/2006/main" xmlns:r="http://schemas.openxmlformats.org/officeDocument/2006/relationships" xmlns:p="http://schemas.openxmlformats.org/presentationml/2006/main" saveSubsetFonts="1">
   <p:sldMasterIdLst>
-    <p:sldMasterId id="2147483672" r:id="rId1"/>
+    <p:sldMasterId id="2147483684" r:id="rId1"/>
   </p:sldMasterIdLst>
   <p:handoutMasterIdLst>
-    <p:handoutMasterId r:id="rId8"/>
+    <p:handoutMasterId r:id="rId9"/>
   </p:handoutMasterIdLst>
   <p:sldIdLst>
     <p:sldId id="256" r:id="rId2"/>
@@ -13,7 +13,8 @@
     <p:sldId id="257" r:id="rId4"/>
     <p:sldId id="265" r:id="rId5"/>
     <p:sldId id="263" r:id="rId6"/>
-    <p:sldId id="264" r:id="rId7"/>
+    <p:sldId id="266" r:id="rId7"/>
+    <p:sldId id="264" r:id="rId8"/>
   </p:sldIdLst>
   <p:sldSz cx="12192000" cy="6858000"/>
   <p:notesSz cx="6858000" cy="9144000"/>
@@ -205,7 +206,7 @@
           <a:p>
             <a:fld id="{34C57D3F-4164-47B7-AB42-9C90AB4D4EBF}" type="datetimeFigureOut">
               <a:rPr lang="ru-RU" smtClean="0"/>
-              <a:t>07.05.2026</a:t>
+              <a:t>13.05.2026</a:t>
             </a:fld>
             <a:endParaRPr lang="ru-RU"/>
           </a:p>
@@ -533,7 +534,7 @@
           <a:p>
             <a:fld id="{7784AEB9-1D2E-476C-97A5-10706365C0EB}" type="datetimeFigureOut">
               <a:rPr lang="ru-RU" smtClean="0"/>
-              <a:t>07.05.2026</a:t>
+              <a:t>13.05.2026</a:t>
             </a:fld>
             <a:endParaRPr lang="ru-RU"/>
           </a:p>
@@ -616,7 +617,7 @@
     </p:spTree>
     <p:extLst>
       <p:ext uri="{BB962C8B-B14F-4D97-AF65-F5344CB8AC3E}">
-        <p14:creationId xmlns:p14="http://schemas.microsoft.com/office/powerpoint/2010/main" val="4187735228"/>
+        <p14:creationId xmlns:p14="http://schemas.microsoft.com/office/powerpoint/2010/main" val="3571727164"/>
       </p:ext>
     </p:extLst>
   </p:cSld>
@@ -795,7 +796,7 @@
           <a:p>
             <a:fld id="{7784AEB9-1D2E-476C-97A5-10706365C0EB}" type="datetimeFigureOut">
               <a:rPr lang="ru-RU" smtClean="0"/>
-              <a:t>07.05.2026</a:t>
+              <a:t>13.05.2026</a:t>
             </a:fld>
             <a:endParaRPr lang="ru-RU"/>
           </a:p>
@@ -846,7 +847,7 @@
     </p:spTree>
     <p:extLst>
       <p:ext uri="{BB962C8B-B14F-4D97-AF65-F5344CB8AC3E}">
-        <p14:creationId xmlns:p14="http://schemas.microsoft.com/office/powerpoint/2010/main" val="2478953315"/>
+        <p14:creationId xmlns:p14="http://schemas.microsoft.com/office/powerpoint/2010/main" val="2101932311"/>
       </p:ext>
     </p:extLst>
   </p:cSld>
@@ -1030,7 +1031,7 @@
           <a:p>
             <a:fld id="{7784AEB9-1D2E-476C-97A5-10706365C0EB}" type="datetimeFigureOut">
               <a:rPr lang="ru-RU" smtClean="0"/>
-              <a:t>07.05.2026</a:t>
+              <a:t>13.05.2026</a:t>
             </a:fld>
             <a:endParaRPr lang="ru-RU"/>
           </a:p>
@@ -1102,7 +1103,7 @@
     </p:spTree>
     <p:extLst>
       <p:ext uri="{BB962C8B-B14F-4D97-AF65-F5344CB8AC3E}">
-        <p14:creationId xmlns:p14="http://schemas.microsoft.com/office/powerpoint/2010/main" val="1237620319"/>
+        <p14:creationId xmlns:p14="http://schemas.microsoft.com/office/powerpoint/2010/main" val="1917998319"/>
       </p:ext>
     </p:extLst>
   </p:cSld>
@@ -1270,7 +1271,7 @@
           <a:p>
             <a:fld id="{7784AEB9-1D2E-476C-97A5-10706365C0EB}" type="datetimeFigureOut">
               <a:rPr lang="ru-RU" smtClean="0"/>
-              <a:t>07.05.2026</a:t>
+              <a:t>13.05.2026</a:t>
             </a:fld>
             <a:endParaRPr lang="ru-RU"/>
           </a:p>
@@ -1326,7 +1327,7 @@
     </p:spTree>
     <p:extLst>
       <p:ext uri="{BB962C8B-B14F-4D97-AF65-F5344CB8AC3E}">
-        <p14:creationId xmlns:p14="http://schemas.microsoft.com/office/powerpoint/2010/main" val="1092600740"/>
+        <p14:creationId xmlns:p14="http://schemas.microsoft.com/office/powerpoint/2010/main" val="582500700"/>
       </p:ext>
     </p:extLst>
   </p:cSld>
@@ -1577,7 +1578,7 @@
           <a:p>
             <a:fld id="{7784AEB9-1D2E-476C-97A5-10706365C0EB}" type="datetimeFigureOut">
               <a:rPr lang="ru-RU" smtClean="0"/>
-              <a:t>07.05.2026</a:t>
+              <a:t>13.05.2026</a:t>
             </a:fld>
             <a:endParaRPr lang="ru-RU"/>
           </a:p>
@@ -1650,7 +1651,7 @@
     </p:spTree>
     <p:extLst>
       <p:ext uri="{BB962C8B-B14F-4D97-AF65-F5344CB8AC3E}">
-        <p14:creationId xmlns:p14="http://schemas.microsoft.com/office/powerpoint/2010/main" val="2829147057"/>
+        <p14:creationId xmlns:p14="http://schemas.microsoft.com/office/powerpoint/2010/main" val="887905673"/>
       </p:ext>
     </p:extLst>
   </p:cSld>
@@ -1879,7 +1880,7 @@
           <a:p>
             <a:fld id="{7784AEB9-1D2E-476C-97A5-10706365C0EB}" type="datetimeFigureOut">
               <a:rPr lang="ru-RU" smtClean="0"/>
-              <a:t>07.05.2026</a:t>
+              <a:t>13.05.2026</a:t>
             </a:fld>
             <a:endParaRPr lang="ru-RU"/>
           </a:p>
@@ -1930,7 +1931,7 @@
     </p:spTree>
     <p:extLst>
       <p:ext uri="{BB962C8B-B14F-4D97-AF65-F5344CB8AC3E}">
-        <p14:creationId xmlns:p14="http://schemas.microsoft.com/office/powerpoint/2010/main" val="1050014980"/>
+        <p14:creationId xmlns:p14="http://schemas.microsoft.com/office/powerpoint/2010/main" val="1259654424"/>
       </p:ext>
     </p:extLst>
   </p:cSld>
@@ -2301,7 +2302,7 @@
           <a:p>
             <a:fld id="{7784AEB9-1D2E-476C-97A5-10706365C0EB}" type="datetimeFigureOut">
               <a:rPr lang="ru-RU" smtClean="0"/>
-              <a:t>07.05.2026</a:t>
+              <a:t>13.05.2026</a:t>
             </a:fld>
             <a:endParaRPr lang="ru-RU"/>
           </a:p>
@@ -2352,7 +2353,7 @@
     </p:spTree>
     <p:extLst>
       <p:ext uri="{BB962C8B-B14F-4D97-AF65-F5344CB8AC3E}">
-        <p14:creationId xmlns:p14="http://schemas.microsoft.com/office/powerpoint/2010/main" val="3957915723"/>
+        <p14:creationId xmlns:p14="http://schemas.microsoft.com/office/powerpoint/2010/main" val="4213028223"/>
       </p:ext>
     </p:extLst>
   </p:cSld>
@@ -2381,71 +2382,6 @@
       </p:grpSpPr>
       <p:sp>
         <p:nvSpPr>
-          <p:cNvPr id="3" name="Date Placeholder 2"/>
-          <p:cNvSpPr>
-            <a:spLocks noGrp="1"/>
-          </p:cNvSpPr>
-          <p:nvPr>
-            <p:ph type="dt" sz="half" idx="10"/>
-          </p:nvPr>
-        </p:nvSpPr>
-        <p:spPr/>
-        <p:txBody>
-          <a:bodyPr/>
-          <a:lstStyle/>
-          <a:p>
-            <a:fld id="{7784AEB9-1D2E-476C-97A5-10706365C0EB}" type="datetimeFigureOut">
-              <a:rPr lang="ru-RU" smtClean="0"/>
-              <a:t>07.05.2026</a:t>
-            </a:fld>
-            <a:endParaRPr lang="ru-RU"/>
-          </a:p>
-        </p:txBody>
-      </p:sp>
-      <p:sp>
-        <p:nvSpPr>
-          <p:cNvPr id="4" name="Footer Placeholder 3"/>
-          <p:cNvSpPr>
-            <a:spLocks noGrp="1"/>
-          </p:cNvSpPr>
-          <p:nvPr>
-            <p:ph type="ftr" sz="quarter" idx="11"/>
-          </p:nvPr>
-        </p:nvSpPr>
-        <p:spPr/>
-        <p:txBody>
-          <a:bodyPr/>
-          <a:lstStyle/>
-          <a:p>
-            <a:endParaRPr lang="ru-RU"/>
-          </a:p>
-        </p:txBody>
-      </p:sp>
-      <p:sp>
-        <p:nvSpPr>
-          <p:cNvPr id="5" name="Slide Number Placeholder 4"/>
-          <p:cNvSpPr>
-            <a:spLocks noGrp="1"/>
-          </p:cNvSpPr>
-          <p:nvPr>
-            <p:ph type="sldNum" sz="quarter" idx="12"/>
-          </p:nvPr>
-        </p:nvSpPr>
-        <p:spPr/>
-        <p:txBody>
-          <a:bodyPr/>
-          <a:lstStyle/>
-          <a:p>
-            <a:fld id="{BB91319D-FD2D-497E-A462-BCE1D2086E43}" type="slidenum">
-              <a:rPr lang="ru-RU" smtClean="0"/>
-              <a:t>‹#›</a:t>
-            </a:fld>
-            <a:endParaRPr lang="ru-RU"/>
-          </a:p>
-        </p:txBody>
-      </p:sp>
-      <p:sp>
-        <p:nvSpPr>
           <p:cNvPr id="7" name="Rectangle 6"/>
           <p:cNvSpPr>
             <a:spLocks noChangeAspect="1"/>
@@ -2511,10 +2447,75 @@
           </a:p>
         </p:txBody>
       </p:sp>
+      <p:sp>
+        <p:nvSpPr>
+          <p:cNvPr id="3" name="Date Placeholder 2"/>
+          <p:cNvSpPr>
+            <a:spLocks noGrp="1"/>
+          </p:cNvSpPr>
+          <p:nvPr>
+            <p:ph type="dt" sz="half" idx="10"/>
+          </p:nvPr>
+        </p:nvSpPr>
+        <p:spPr/>
+        <p:txBody>
+          <a:bodyPr/>
+          <a:lstStyle/>
+          <a:p>
+            <a:fld id="{7784AEB9-1D2E-476C-97A5-10706365C0EB}" type="datetimeFigureOut">
+              <a:rPr lang="ru-RU" smtClean="0"/>
+              <a:t>13.05.2026</a:t>
+            </a:fld>
+            <a:endParaRPr lang="ru-RU"/>
+          </a:p>
+        </p:txBody>
+      </p:sp>
+      <p:sp>
+        <p:nvSpPr>
+          <p:cNvPr id="4" name="Footer Placeholder 3"/>
+          <p:cNvSpPr>
+            <a:spLocks noGrp="1"/>
+          </p:cNvSpPr>
+          <p:nvPr>
+            <p:ph type="ftr" sz="quarter" idx="11"/>
+          </p:nvPr>
+        </p:nvSpPr>
+        <p:spPr/>
+        <p:txBody>
+          <a:bodyPr/>
+          <a:lstStyle/>
+          <a:p>
+            <a:endParaRPr lang="ru-RU"/>
+          </a:p>
+        </p:txBody>
+      </p:sp>
+      <p:sp>
+        <p:nvSpPr>
+          <p:cNvPr id="5" name="Slide Number Placeholder 4"/>
+          <p:cNvSpPr>
+            <a:spLocks noGrp="1"/>
+          </p:cNvSpPr>
+          <p:nvPr>
+            <p:ph type="sldNum" sz="quarter" idx="12"/>
+          </p:nvPr>
+        </p:nvSpPr>
+        <p:spPr/>
+        <p:txBody>
+          <a:bodyPr/>
+          <a:lstStyle/>
+          <a:p>
+            <a:fld id="{BB91319D-FD2D-497E-A462-BCE1D2086E43}" type="slidenum">
+              <a:rPr lang="ru-RU" smtClean="0"/>
+              <a:t>‹#›</a:t>
+            </a:fld>
+            <a:endParaRPr lang="ru-RU"/>
+          </a:p>
+        </p:txBody>
+      </p:sp>
     </p:spTree>
     <p:extLst>
       <p:ext uri="{BB962C8B-B14F-4D97-AF65-F5344CB8AC3E}">
-        <p14:creationId xmlns:p14="http://schemas.microsoft.com/office/powerpoint/2010/main" val="161978270"/>
+        <p14:creationId xmlns:p14="http://schemas.microsoft.com/office/powerpoint/2010/main" val="3274528216"/>
       </p:ext>
     </p:extLst>
   </p:cSld>
@@ -2558,7 +2559,7 @@
           <a:p>
             <a:fld id="{7784AEB9-1D2E-476C-97A5-10706365C0EB}" type="datetimeFigureOut">
               <a:rPr lang="ru-RU" smtClean="0"/>
-              <a:t>07.05.2026</a:t>
+              <a:t>13.05.2026</a:t>
             </a:fld>
             <a:endParaRPr lang="ru-RU"/>
           </a:p>
@@ -2609,7 +2610,7 @@
     </p:spTree>
     <p:extLst>
       <p:ext uri="{BB962C8B-B14F-4D97-AF65-F5344CB8AC3E}">
-        <p14:creationId xmlns:p14="http://schemas.microsoft.com/office/powerpoint/2010/main" val="942995389"/>
+        <p14:creationId xmlns:p14="http://schemas.microsoft.com/office/powerpoint/2010/main" val="355621466"/>
       </p:ext>
     </p:extLst>
   </p:cSld>
@@ -2936,7 +2937,7 @@
           <a:p>
             <a:fld id="{7784AEB9-1D2E-476C-97A5-10706365C0EB}" type="datetimeFigureOut">
               <a:rPr lang="ru-RU" smtClean="0"/>
-              <a:t>07.05.2026</a:t>
+              <a:t>13.05.2026</a:t>
             </a:fld>
             <a:endParaRPr lang="ru-RU"/>
           </a:p>
@@ -3009,7 +3010,7 @@
     </p:spTree>
     <p:extLst>
       <p:ext uri="{BB962C8B-B14F-4D97-AF65-F5344CB8AC3E}">
-        <p14:creationId xmlns:p14="http://schemas.microsoft.com/office/powerpoint/2010/main" val="2479796656"/>
+        <p14:creationId xmlns:p14="http://schemas.microsoft.com/office/powerpoint/2010/main" val="1420219150"/>
       </p:ext>
     </p:extLst>
   </p:cSld>
@@ -3225,7 +3226,7 @@
           <a:p>
             <a:fld id="{7784AEB9-1D2E-476C-97A5-10706365C0EB}" type="datetimeFigureOut">
               <a:rPr lang="ru-RU" smtClean="0"/>
-              <a:t>07.05.2026</a:t>
+              <a:t>13.05.2026</a:t>
             </a:fld>
             <a:endParaRPr lang="ru-RU"/>
           </a:p>
@@ -3276,7 +3277,7 @@
     </p:spTree>
     <p:extLst>
       <p:ext uri="{BB962C8B-B14F-4D97-AF65-F5344CB8AC3E}">
-        <p14:creationId xmlns:p14="http://schemas.microsoft.com/office/powerpoint/2010/main" val="3757823213"/>
+        <p14:creationId xmlns:p14="http://schemas.microsoft.com/office/powerpoint/2010/main" val="113956654"/>
       </p:ext>
     </p:extLst>
   </p:cSld>
@@ -3436,7 +3437,7 @@
           <a:p>
             <a:fld id="{7784AEB9-1D2E-476C-97A5-10706365C0EB}" type="datetimeFigureOut">
               <a:rPr lang="ru-RU" smtClean="0"/>
-              <a:t>07.05.2026</a:t>
+              <a:t>13.05.2026</a:t>
             </a:fld>
             <a:endParaRPr lang="ru-RU"/>
           </a:p>
@@ -3630,23 +3631,23 @@
     </p:spTree>
     <p:extLst>
       <p:ext uri="{BB962C8B-B14F-4D97-AF65-F5344CB8AC3E}">
-        <p14:creationId xmlns:p14="http://schemas.microsoft.com/office/powerpoint/2010/main" val="3552270595"/>
+        <p14:creationId xmlns:p14="http://schemas.microsoft.com/office/powerpoint/2010/main" val="4225717341"/>
       </p:ext>
     </p:extLst>
   </p:cSld>
   <p:clrMap bg1="lt1" tx1="dk1" bg2="lt2" tx2="dk2" accent1="accent1" accent2="accent2" accent3="accent3" accent4="accent4" accent5="accent5" accent6="accent6" hlink="hlink" folHlink="folHlink"/>
   <p:sldLayoutIdLst>
-    <p:sldLayoutId id="2147483673" r:id="rId1"/>
-    <p:sldLayoutId id="2147483674" r:id="rId2"/>
-    <p:sldLayoutId id="2147483675" r:id="rId3"/>
-    <p:sldLayoutId id="2147483676" r:id="rId4"/>
-    <p:sldLayoutId id="2147483677" r:id="rId5"/>
-    <p:sldLayoutId id="2147483678" r:id="rId6"/>
-    <p:sldLayoutId id="2147483679" r:id="rId7"/>
-    <p:sldLayoutId id="2147483680" r:id="rId8"/>
-    <p:sldLayoutId id="2147483681" r:id="rId9"/>
-    <p:sldLayoutId id="2147483682" r:id="rId10"/>
-    <p:sldLayoutId id="2147483683" r:id="rId11"/>
+    <p:sldLayoutId id="2147483685" r:id="rId1"/>
+    <p:sldLayoutId id="2147483686" r:id="rId2"/>
+    <p:sldLayoutId id="2147483687" r:id="rId3"/>
+    <p:sldLayoutId id="2147483688" r:id="rId4"/>
+    <p:sldLayoutId id="2147483689" r:id="rId5"/>
+    <p:sldLayoutId id="2147483690" r:id="rId6"/>
+    <p:sldLayoutId id="2147483691" r:id="rId7"/>
+    <p:sldLayoutId id="2147483692" r:id="rId8"/>
+    <p:sldLayoutId id="2147483693" r:id="rId9"/>
+    <p:sldLayoutId id="2147483694" r:id="rId10"/>
+    <p:sldLayoutId id="2147483695" r:id="rId11"/>
   </p:sldLayoutIdLst>
   <p:txStyles>
     <p:titleStyle>
@@ -4053,8 +4054,12 @@
           <a:lstStyle/>
           <a:p>
             <a:r>
+              <a:rPr lang="en-US" sz="4800" b="1" dirty="0" err="1"/>
+              <a:t>FunLearn</a:t>
+            </a:r>
+            <a:r>
               <a:rPr lang="en-US" sz="4800" b="1" dirty="0"/>
-              <a:t>decision randomizer</a:t>
+              <a:t> English</a:t>
             </a:r>
             <a:endParaRPr lang="ru-RU" dirty="0"/>
           </a:p>
@@ -4177,8 +4182,12 @@
               <a:t>Что такое </a:t>
             </a:r>
             <a:r>
-              <a:rPr lang="en-US" sz="3600" dirty="0" smtClean="0"/>
-              <a:t>decision randomizer</a:t>
+              <a:rPr lang="en-US" sz="3600" b="1" dirty="0" err="1"/>
+              <a:t>FunLearn</a:t>
+            </a:r>
+            <a:r>
+              <a:rPr lang="en-US" sz="3600" b="1" dirty="0"/>
+              <a:t> English</a:t>
             </a:r>
             <a:r>
               <a:rPr lang="ru-RU" dirty="0" smtClean="0"/>
@@ -4200,8 +4209,8 @@
         </p:nvSpPr>
         <p:spPr>
           <a:xfrm>
-            <a:off x="0" y="4444724"/>
-            <a:ext cx="12191999" cy="3678303"/>
+            <a:off x="0" y="5577016"/>
+            <a:ext cx="12191999" cy="1640451"/>
           </a:xfrm>
         </p:spPr>
         <p:txBody>
@@ -4215,7 +4224,11 @@
             </a:pPr>
             <a:r>
               <a:rPr lang="ru-RU" sz="2400" dirty="0" smtClean="0"/>
-              <a:t>Это твой личный генератор неожиданных решений </a:t>
+              <a:t>Это </a:t>
+            </a:r>
+            <a:r>
+              <a:rPr lang="ru-RU" sz="2400" dirty="0"/>
+              <a:t>твой личный генератор английского контента для прокачки языка без скуки</a:t>
             </a:r>
             <a:endParaRPr lang="ru-RU" sz="2400" dirty="0"/>
           </a:p>
@@ -4243,7 +4256,7 @@
         </p:blipFill>
         <p:spPr>
           <a:xfrm>
-            <a:off x="2121853" y="1846217"/>
+            <a:off x="1965333" y="1846216"/>
             <a:ext cx="7948294" cy="4335433"/>
           </a:xfrm>
           <a:prstGeom prst="rect">
@@ -4251,6 +4264,507 @@
           </a:prstGeom>
         </p:spPr>
       </p:pic>
+      <p:sp>
+        <p:nvSpPr>
+          <p:cNvPr id="6" name="Объект 2"/>
+          <p:cNvSpPr txBox="1">
+            <a:spLocks/>
+          </p:cNvSpPr>
+          <p:nvPr/>
+        </p:nvSpPr>
+        <p:spPr>
+          <a:xfrm>
+            <a:off x="581192" y="1846217"/>
+            <a:ext cx="3908429" cy="4506098"/>
+          </a:xfrm>
+          <a:prstGeom prst="rect">
+            <a:avLst/>
+          </a:prstGeom>
+        </p:spPr>
+        <p:txBody>
+          <a:bodyPr vert="horz" lIns="91440" tIns="45720" rIns="91440" bIns="45720" rtlCol="0" anchor="ctr">
+            <a:normAutofit/>
+          </a:bodyPr>
+          <a:lstStyle>
+            <a:lvl1pPr marL="306000" indent="-306000" algn="l" defTabSz="457200" rtl="0" eaLnBrk="1" latinLnBrk="0" hangingPunct="1">
+              <a:spcBef>
+                <a:spcPct val="20000"/>
+              </a:spcBef>
+              <a:spcAft>
+                <a:spcPts val="600"/>
+              </a:spcAft>
+              <a:buClr>
+                <a:schemeClr val="accent2"/>
+              </a:buClr>
+              <a:buSzPct val="92000"/>
+              <a:buFont typeface="Wingdings 2" panose="05020102010507070707" pitchFamily="18" charset="2"/>
+              <a:buChar char=""/>
+              <a:defRPr sz="1800" kern="1200">
+                <a:solidFill>
+                  <a:schemeClr val="tx2"/>
+                </a:solidFill>
+                <a:latin typeface="+mn-lt"/>
+                <a:ea typeface="+mn-ea"/>
+                <a:cs typeface="+mn-cs"/>
+              </a:defRPr>
+            </a:lvl1pPr>
+            <a:lvl2pPr marL="630000" indent="-306000" algn="l" defTabSz="457200" rtl="0" eaLnBrk="1" latinLnBrk="0" hangingPunct="1">
+              <a:spcBef>
+                <a:spcPct val="20000"/>
+              </a:spcBef>
+              <a:spcAft>
+                <a:spcPts val="600"/>
+              </a:spcAft>
+              <a:buClr>
+                <a:schemeClr val="accent2"/>
+              </a:buClr>
+              <a:buSzPct val="92000"/>
+              <a:buFont typeface="Wingdings 2" panose="05020102010507070707" pitchFamily="18" charset="2"/>
+              <a:buChar char=""/>
+              <a:defRPr sz="1600" kern="1200">
+                <a:solidFill>
+                  <a:schemeClr val="tx2"/>
+                </a:solidFill>
+                <a:latin typeface="+mn-lt"/>
+                <a:ea typeface="+mn-ea"/>
+                <a:cs typeface="+mn-cs"/>
+              </a:defRPr>
+            </a:lvl2pPr>
+            <a:lvl3pPr marL="900000" indent="-270000" algn="l" defTabSz="457200" rtl="0" eaLnBrk="1" latinLnBrk="0" hangingPunct="1">
+              <a:spcBef>
+                <a:spcPct val="20000"/>
+              </a:spcBef>
+              <a:spcAft>
+                <a:spcPts val="600"/>
+              </a:spcAft>
+              <a:buClr>
+                <a:schemeClr val="accent2"/>
+              </a:buClr>
+              <a:buSzPct val="92000"/>
+              <a:buFont typeface="Wingdings 2" panose="05020102010507070707" pitchFamily="18" charset="2"/>
+              <a:buChar char=""/>
+              <a:defRPr sz="1400" kern="1200">
+                <a:solidFill>
+                  <a:schemeClr val="tx2"/>
+                </a:solidFill>
+                <a:latin typeface="+mn-lt"/>
+                <a:ea typeface="+mn-ea"/>
+                <a:cs typeface="+mn-cs"/>
+              </a:defRPr>
+            </a:lvl3pPr>
+            <a:lvl4pPr marL="1242000" indent="-234000" algn="l" defTabSz="457200" rtl="0" eaLnBrk="1" latinLnBrk="0" hangingPunct="1">
+              <a:spcBef>
+                <a:spcPct val="20000"/>
+              </a:spcBef>
+              <a:spcAft>
+                <a:spcPts val="600"/>
+              </a:spcAft>
+              <a:buClr>
+                <a:schemeClr val="accent2"/>
+              </a:buClr>
+              <a:buSzPct val="92000"/>
+              <a:buFont typeface="Wingdings 2" panose="05020102010507070707" pitchFamily="18" charset="2"/>
+              <a:buChar char=""/>
+              <a:defRPr sz="1200" kern="1200">
+                <a:solidFill>
+                  <a:schemeClr val="tx2"/>
+                </a:solidFill>
+                <a:latin typeface="+mn-lt"/>
+                <a:ea typeface="+mn-ea"/>
+                <a:cs typeface="+mn-cs"/>
+              </a:defRPr>
+            </a:lvl4pPr>
+            <a:lvl5pPr marL="1602000" indent="-234000" algn="l" defTabSz="457200" rtl="0" eaLnBrk="1" latinLnBrk="0" hangingPunct="1">
+              <a:spcBef>
+                <a:spcPct val="20000"/>
+              </a:spcBef>
+              <a:spcAft>
+                <a:spcPts val="600"/>
+              </a:spcAft>
+              <a:buClr>
+                <a:schemeClr val="accent2"/>
+              </a:buClr>
+              <a:buSzPct val="92000"/>
+              <a:buFont typeface="Wingdings 2" panose="05020102010507070707" pitchFamily="18" charset="2"/>
+              <a:buChar char=""/>
+              <a:defRPr sz="1200" kern="1200">
+                <a:solidFill>
+                  <a:schemeClr val="tx2"/>
+                </a:solidFill>
+                <a:latin typeface="+mn-lt"/>
+                <a:ea typeface="+mn-ea"/>
+                <a:cs typeface="+mn-cs"/>
+              </a:defRPr>
+            </a:lvl5pPr>
+            <a:lvl6pPr marL="1900000" indent="-228600" algn="l" defTabSz="457200" rtl="0" eaLnBrk="1" latinLnBrk="0" hangingPunct="1">
+              <a:spcBef>
+                <a:spcPct val="20000"/>
+              </a:spcBef>
+              <a:spcAft>
+                <a:spcPts val="600"/>
+              </a:spcAft>
+              <a:buClr>
+                <a:schemeClr val="accent2"/>
+              </a:buClr>
+              <a:buSzPct val="92000"/>
+              <a:buFont typeface="Wingdings 2" panose="05020102010507070707" pitchFamily="18" charset="2"/>
+              <a:buChar char=""/>
+              <a:defRPr sz="1200" kern="1200">
+                <a:solidFill>
+                  <a:schemeClr val="tx2"/>
+                </a:solidFill>
+                <a:latin typeface="+mn-lt"/>
+                <a:ea typeface="+mn-ea"/>
+                <a:cs typeface="+mn-cs"/>
+              </a:defRPr>
+            </a:lvl6pPr>
+            <a:lvl7pPr marL="2200000" indent="-228600" algn="l" defTabSz="457200" rtl="0" eaLnBrk="1" latinLnBrk="0" hangingPunct="1">
+              <a:spcBef>
+                <a:spcPct val="20000"/>
+              </a:spcBef>
+              <a:spcAft>
+                <a:spcPts val="600"/>
+              </a:spcAft>
+              <a:buClr>
+                <a:schemeClr val="accent2"/>
+              </a:buClr>
+              <a:buSzPct val="92000"/>
+              <a:buFont typeface="Wingdings 2" panose="05020102010507070707" pitchFamily="18" charset="2"/>
+              <a:buChar char=""/>
+              <a:defRPr sz="1200" kern="1200">
+                <a:solidFill>
+                  <a:schemeClr val="tx2"/>
+                </a:solidFill>
+                <a:latin typeface="+mn-lt"/>
+                <a:ea typeface="+mn-ea"/>
+                <a:cs typeface="+mn-cs"/>
+              </a:defRPr>
+            </a:lvl7pPr>
+            <a:lvl8pPr marL="2500000" indent="-228600" algn="l" defTabSz="457200" rtl="0" eaLnBrk="1" latinLnBrk="0" hangingPunct="1">
+              <a:spcBef>
+                <a:spcPct val="20000"/>
+              </a:spcBef>
+              <a:spcAft>
+                <a:spcPts val="600"/>
+              </a:spcAft>
+              <a:buClr>
+                <a:schemeClr val="accent2"/>
+              </a:buClr>
+              <a:buSzPct val="92000"/>
+              <a:buFont typeface="Wingdings 2" panose="05020102010507070707" pitchFamily="18" charset="2"/>
+              <a:buChar char=""/>
+              <a:defRPr sz="1200" kern="1200">
+                <a:solidFill>
+                  <a:schemeClr val="tx2"/>
+                </a:solidFill>
+                <a:latin typeface="+mn-lt"/>
+                <a:ea typeface="+mn-ea"/>
+                <a:cs typeface="+mn-cs"/>
+              </a:defRPr>
+            </a:lvl8pPr>
+            <a:lvl9pPr marL="2800000" indent="-228600" algn="l" defTabSz="457200" rtl="0" eaLnBrk="1" latinLnBrk="0" hangingPunct="1">
+              <a:spcBef>
+                <a:spcPct val="20000"/>
+              </a:spcBef>
+              <a:spcAft>
+                <a:spcPts val="600"/>
+              </a:spcAft>
+              <a:buClr>
+                <a:schemeClr val="accent2"/>
+              </a:buClr>
+              <a:buSzPct val="92000"/>
+              <a:buFont typeface="Wingdings 2" panose="05020102010507070707" pitchFamily="18" charset="2"/>
+              <a:buChar char=""/>
+              <a:defRPr sz="1200" kern="1200">
+                <a:solidFill>
+                  <a:schemeClr val="tx2"/>
+                </a:solidFill>
+                <a:latin typeface="+mn-lt"/>
+                <a:ea typeface="+mn-ea"/>
+                <a:cs typeface="+mn-cs"/>
+              </a:defRPr>
+            </a:lvl9pPr>
+          </a:lstStyle>
+          <a:p>
+            <a:r>
+              <a:rPr lang="ru-RU" sz="2000" b="1" dirty="0" smtClean="0"/>
+              <a:t>Рецепты</a:t>
+            </a:r>
+          </a:p>
+          <a:p>
+            <a:r>
+              <a:rPr lang="ru-RU" sz="2000" b="1" dirty="0" smtClean="0"/>
+              <a:t>Шутки </a:t>
+            </a:r>
+            <a:r>
+              <a:rPr lang="ru-RU" sz="2000" b="1" dirty="0"/>
+              <a:t>с неожиданной </a:t>
+            </a:r>
+            <a:r>
+              <a:rPr lang="ru-RU" sz="2000" b="1" dirty="0" smtClean="0"/>
+              <a:t>развязкой</a:t>
+            </a:r>
+          </a:p>
+          <a:p>
+            <a:r>
+              <a:rPr lang="ru-RU" sz="2000" b="1" dirty="0" smtClean="0"/>
+              <a:t>Советы </a:t>
+            </a:r>
+            <a:r>
+              <a:rPr lang="ru-RU" sz="2000" b="1" dirty="0"/>
+              <a:t>и мудрые мысли</a:t>
+            </a:r>
+            <a:endParaRPr lang="ru-RU" sz="2000" b="1" dirty="0"/>
+          </a:p>
+        </p:txBody>
+      </p:sp>
+      <p:sp>
+        <p:nvSpPr>
+          <p:cNvPr id="8" name="Объект 2"/>
+          <p:cNvSpPr txBox="1">
+            <a:spLocks/>
+          </p:cNvSpPr>
+          <p:nvPr/>
+        </p:nvSpPr>
+        <p:spPr>
+          <a:xfrm>
+            <a:off x="8165358" y="2082159"/>
+            <a:ext cx="3908429" cy="4506098"/>
+          </a:xfrm>
+          <a:prstGeom prst="rect">
+            <a:avLst/>
+          </a:prstGeom>
+        </p:spPr>
+        <p:txBody>
+          <a:bodyPr vert="horz" lIns="91440" tIns="45720" rIns="91440" bIns="45720" rtlCol="0" anchor="ctr">
+            <a:normAutofit/>
+          </a:bodyPr>
+          <a:lstStyle>
+            <a:lvl1pPr marL="306000" indent="-306000" algn="l" defTabSz="457200" rtl="0" eaLnBrk="1" latinLnBrk="0" hangingPunct="1">
+              <a:spcBef>
+                <a:spcPct val="20000"/>
+              </a:spcBef>
+              <a:spcAft>
+                <a:spcPts val="600"/>
+              </a:spcAft>
+              <a:buClr>
+                <a:schemeClr val="accent2"/>
+              </a:buClr>
+              <a:buSzPct val="92000"/>
+              <a:buFont typeface="Wingdings 2" panose="05020102010507070707" pitchFamily="18" charset="2"/>
+              <a:buChar char=""/>
+              <a:defRPr sz="1800" kern="1200">
+                <a:solidFill>
+                  <a:schemeClr val="tx2"/>
+                </a:solidFill>
+                <a:latin typeface="+mn-lt"/>
+                <a:ea typeface="+mn-ea"/>
+                <a:cs typeface="+mn-cs"/>
+              </a:defRPr>
+            </a:lvl1pPr>
+            <a:lvl2pPr marL="630000" indent="-306000" algn="l" defTabSz="457200" rtl="0" eaLnBrk="1" latinLnBrk="0" hangingPunct="1">
+              <a:spcBef>
+                <a:spcPct val="20000"/>
+              </a:spcBef>
+              <a:spcAft>
+                <a:spcPts val="600"/>
+              </a:spcAft>
+              <a:buClr>
+                <a:schemeClr val="accent2"/>
+              </a:buClr>
+              <a:buSzPct val="92000"/>
+              <a:buFont typeface="Wingdings 2" panose="05020102010507070707" pitchFamily="18" charset="2"/>
+              <a:buChar char=""/>
+              <a:defRPr sz="1600" kern="1200">
+                <a:solidFill>
+                  <a:schemeClr val="tx2"/>
+                </a:solidFill>
+                <a:latin typeface="+mn-lt"/>
+                <a:ea typeface="+mn-ea"/>
+                <a:cs typeface="+mn-cs"/>
+              </a:defRPr>
+            </a:lvl2pPr>
+            <a:lvl3pPr marL="900000" indent="-270000" algn="l" defTabSz="457200" rtl="0" eaLnBrk="1" latinLnBrk="0" hangingPunct="1">
+              <a:spcBef>
+                <a:spcPct val="20000"/>
+              </a:spcBef>
+              <a:spcAft>
+                <a:spcPts val="600"/>
+              </a:spcAft>
+              <a:buClr>
+                <a:schemeClr val="accent2"/>
+              </a:buClr>
+              <a:buSzPct val="92000"/>
+              <a:buFont typeface="Wingdings 2" panose="05020102010507070707" pitchFamily="18" charset="2"/>
+              <a:buChar char=""/>
+              <a:defRPr sz="1400" kern="1200">
+                <a:solidFill>
+                  <a:schemeClr val="tx2"/>
+                </a:solidFill>
+                <a:latin typeface="+mn-lt"/>
+                <a:ea typeface="+mn-ea"/>
+                <a:cs typeface="+mn-cs"/>
+              </a:defRPr>
+            </a:lvl3pPr>
+            <a:lvl4pPr marL="1242000" indent="-234000" algn="l" defTabSz="457200" rtl="0" eaLnBrk="1" latinLnBrk="0" hangingPunct="1">
+              <a:spcBef>
+                <a:spcPct val="20000"/>
+              </a:spcBef>
+              <a:spcAft>
+                <a:spcPts val="600"/>
+              </a:spcAft>
+              <a:buClr>
+                <a:schemeClr val="accent2"/>
+              </a:buClr>
+              <a:buSzPct val="92000"/>
+              <a:buFont typeface="Wingdings 2" panose="05020102010507070707" pitchFamily="18" charset="2"/>
+              <a:buChar char=""/>
+              <a:defRPr sz="1200" kern="1200">
+                <a:solidFill>
+                  <a:schemeClr val="tx2"/>
+                </a:solidFill>
+                <a:latin typeface="+mn-lt"/>
+                <a:ea typeface="+mn-ea"/>
+                <a:cs typeface="+mn-cs"/>
+              </a:defRPr>
+            </a:lvl4pPr>
+            <a:lvl5pPr marL="1602000" indent="-234000" algn="l" defTabSz="457200" rtl="0" eaLnBrk="1" latinLnBrk="0" hangingPunct="1">
+              <a:spcBef>
+                <a:spcPct val="20000"/>
+              </a:spcBef>
+              <a:spcAft>
+                <a:spcPts val="600"/>
+              </a:spcAft>
+              <a:buClr>
+                <a:schemeClr val="accent2"/>
+              </a:buClr>
+              <a:buSzPct val="92000"/>
+              <a:buFont typeface="Wingdings 2" panose="05020102010507070707" pitchFamily="18" charset="2"/>
+              <a:buChar char=""/>
+              <a:defRPr sz="1200" kern="1200">
+                <a:solidFill>
+                  <a:schemeClr val="tx2"/>
+                </a:solidFill>
+                <a:latin typeface="+mn-lt"/>
+                <a:ea typeface="+mn-ea"/>
+                <a:cs typeface="+mn-cs"/>
+              </a:defRPr>
+            </a:lvl5pPr>
+            <a:lvl6pPr marL="1900000" indent="-228600" algn="l" defTabSz="457200" rtl="0" eaLnBrk="1" latinLnBrk="0" hangingPunct="1">
+              <a:spcBef>
+                <a:spcPct val="20000"/>
+              </a:spcBef>
+              <a:spcAft>
+                <a:spcPts val="600"/>
+              </a:spcAft>
+              <a:buClr>
+                <a:schemeClr val="accent2"/>
+              </a:buClr>
+              <a:buSzPct val="92000"/>
+              <a:buFont typeface="Wingdings 2" panose="05020102010507070707" pitchFamily="18" charset="2"/>
+              <a:buChar char=""/>
+              <a:defRPr sz="1200" kern="1200">
+                <a:solidFill>
+                  <a:schemeClr val="tx2"/>
+                </a:solidFill>
+                <a:latin typeface="+mn-lt"/>
+                <a:ea typeface="+mn-ea"/>
+                <a:cs typeface="+mn-cs"/>
+              </a:defRPr>
+            </a:lvl6pPr>
+            <a:lvl7pPr marL="2200000" indent="-228600" algn="l" defTabSz="457200" rtl="0" eaLnBrk="1" latinLnBrk="0" hangingPunct="1">
+              <a:spcBef>
+                <a:spcPct val="20000"/>
+              </a:spcBef>
+              <a:spcAft>
+                <a:spcPts val="600"/>
+              </a:spcAft>
+              <a:buClr>
+                <a:schemeClr val="accent2"/>
+              </a:buClr>
+              <a:buSzPct val="92000"/>
+              <a:buFont typeface="Wingdings 2" panose="05020102010507070707" pitchFamily="18" charset="2"/>
+              <a:buChar char=""/>
+              <a:defRPr sz="1200" kern="1200">
+                <a:solidFill>
+                  <a:schemeClr val="tx2"/>
+                </a:solidFill>
+                <a:latin typeface="+mn-lt"/>
+                <a:ea typeface="+mn-ea"/>
+                <a:cs typeface="+mn-cs"/>
+              </a:defRPr>
+            </a:lvl7pPr>
+            <a:lvl8pPr marL="2500000" indent="-228600" algn="l" defTabSz="457200" rtl="0" eaLnBrk="1" latinLnBrk="0" hangingPunct="1">
+              <a:spcBef>
+                <a:spcPct val="20000"/>
+              </a:spcBef>
+              <a:spcAft>
+                <a:spcPts val="600"/>
+              </a:spcAft>
+              <a:buClr>
+                <a:schemeClr val="accent2"/>
+              </a:buClr>
+              <a:buSzPct val="92000"/>
+              <a:buFont typeface="Wingdings 2" panose="05020102010507070707" pitchFamily="18" charset="2"/>
+              <a:buChar char=""/>
+              <a:defRPr sz="1200" kern="1200">
+                <a:solidFill>
+                  <a:schemeClr val="tx2"/>
+                </a:solidFill>
+                <a:latin typeface="+mn-lt"/>
+                <a:ea typeface="+mn-ea"/>
+                <a:cs typeface="+mn-cs"/>
+              </a:defRPr>
+            </a:lvl8pPr>
+            <a:lvl9pPr marL="2800000" indent="-228600" algn="l" defTabSz="457200" rtl="0" eaLnBrk="1" latinLnBrk="0" hangingPunct="1">
+              <a:spcBef>
+                <a:spcPct val="20000"/>
+              </a:spcBef>
+              <a:spcAft>
+                <a:spcPts val="600"/>
+              </a:spcAft>
+              <a:buClr>
+                <a:schemeClr val="accent2"/>
+              </a:buClr>
+              <a:buSzPct val="92000"/>
+              <a:buFont typeface="Wingdings 2" panose="05020102010507070707" pitchFamily="18" charset="2"/>
+              <a:buChar char=""/>
+              <a:defRPr sz="1200" kern="1200">
+                <a:solidFill>
+                  <a:schemeClr val="tx2"/>
+                </a:solidFill>
+                <a:latin typeface="+mn-lt"/>
+                <a:ea typeface="+mn-ea"/>
+                <a:cs typeface="+mn-cs"/>
+              </a:defRPr>
+            </a:lvl9pPr>
+          </a:lstStyle>
+          <a:p>
+            <a:r>
+              <a:rPr lang="ru-RU" sz="2000" b="1" dirty="0"/>
+              <a:t>Викторина с проверкой знаний</a:t>
+            </a:r>
+          </a:p>
+          <a:p>
+            <a:r>
+              <a:rPr lang="ru-RU" sz="2000" b="1" dirty="0" smtClean="0"/>
+              <a:t>Что </a:t>
+            </a:r>
+            <a:r>
+              <a:rPr lang="ru-RU" sz="2000" b="1" dirty="0"/>
+              <a:t>скрывает твоё имя? (возраст, пол, страна</a:t>
+            </a:r>
+            <a:r>
+              <a:rPr lang="ru-RU" sz="2000" b="1" dirty="0" smtClean="0"/>
+              <a:t>)</a:t>
+            </a:r>
+            <a:endParaRPr lang="ru-RU" sz="2000" b="1" dirty="0"/>
+          </a:p>
+          <a:p>
+            <a:endParaRPr lang="ru-RU" sz="2000" b="1" dirty="0"/>
+          </a:p>
+        </p:txBody>
+      </p:sp>
     </p:spTree>
     <p:extLst>
       <p:ext uri="{BB962C8B-B14F-4D97-AF65-F5344CB8AC3E}">
@@ -4323,7 +4837,7 @@
         </p:nvSpPr>
         <p:spPr>
           <a:xfrm>
-            <a:off x="581193" y="1968844"/>
+            <a:off x="457625" y="1968843"/>
             <a:ext cx="5539522" cy="4506098"/>
           </a:xfrm>
         </p:spPr>
@@ -4346,27 +4860,30 @@
               <a:t> </a:t>
             </a:r>
             <a:r>
+              <a:rPr lang="ru-RU" b="1" dirty="0"/>
+              <a:t>Сделать изучение английского языка увлекательным </a:t>
+            </a:r>
+            <a:r>
               <a:rPr lang="ru-RU" b="1" dirty="0" smtClean="0"/>
-              <a:t>Спасти людей от скуки и бесконечных     </a:t>
-            </a:r>
-            <a:r>
-              <a:rPr lang="en-US" b="1" dirty="0" smtClean="0"/>
-              <a:t>“</a:t>
+              <a:t>через </a:t>
+            </a:r>
+            <a:r>
+              <a:rPr lang="ru-RU" b="1" dirty="0"/>
+              <a:t>генерацию случайного англоязычного </a:t>
             </a:r>
             <a:r>
               <a:rPr lang="ru-RU" b="1" dirty="0" smtClean="0"/>
-              <a:t>не знаю</a:t>
-            </a:r>
-            <a:r>
-              <a:rPr lang="en-US" b="1" dirty="0" smtClean="0"/>
-              <a:t>”</a:t>
-            </a:r>
-            <a:endParaRPr lang="ru-RU" b="1" dirty="0" smtClean="0"/>
-          </a:p>
-          <a:p>
-            <a:r>
-              <a:rPr lang="ru-RU" b="1" dirty="0" smtClean="0"/>
-              <a:t>ПРЕИМУЩЕСТВА:</a:t>
+              <a:t>контента</a:t>
+            </a:r>
+          </a:p>
+          <a:p>
+            <a:r>
+              <a:rPr lang="ru-RU" dirty="0" smtClean="0"/>
+              <a:t>💎 </a:t>
+            </a:r>
+            <a:r>
+              <a:rPr lang="ru-RU" dirty="0"/>
+              <a:t>ИНТУИТИВНЫЙ ИНТЕРФЕЙС</a:t>
             </a:r>
             <a:r>
               <a:rPr lang="ru-RU" dirty="0"/>
@@ -4376,8 +4893,8 @@
               <a:rPr lang="ru-RU" dirty="0"/>
             </a:br>
             <a:r>
-              <a:rPr lang="ru-RU" dirty="0" smtClean="0"/>
-              <a:t>💎ИНТУИТИВНО ПОНЯТНЫЙ ИНТЕРФЕЙС</a:t>
+              <a:rPr lang="ru-RU" dirty="0"/>
+              <a:t>✨ ЯРКИЙ ДИЗАЙН</a:t>
             </a:r>
             <a:r>
               <a:rPr lang="ru-RU" dirty="0"/>
@@ -4387,8 +4904,8 @@
               <a:rPr lang="ru-RU" dirty="0"/>
             </a:br>
             <a:r>
-              <a:rPr lang="ru-RU" dirty="0" smtClean="0"/>
-              <a:t>✨ЯРКИЙ ДИЗАЙН</a:t>
+              <a:rPr lang="ru-RU" dirty="0"/>
+              <a:t>⚡ МИНИМУМ КЛИКОВ</a:t>
             </a:r>
             <a:r>
               <a:rPr lang="ru-RU" dirty="0"/>
@@ -4398,12 +4915,8 @@
               <a:rPr lang="ru-RU" dirty="0"/>
             </a:br>
             <a:r>
-              <a:rPr lang="ru-RU" b="1" dirty="0" smtClean="0"/>
-              <a:t>⚡ </a:t>
-            </a:r>
-            <a:r>
-              <a:rPr lang="ru-RU" dirty="0" smtClean="0"/>
-              <a:t>МИНИМУМ КЛИКОВ</a:t>
+              <a:rPr lang="ru-RU" dirty="0"/>
+              <a:t>🌍 АНГЛИЙСКИЙ В КАЖДОМ БЛОКЕ</a:t>
             </a:r>
             <a:r>
               <a:rPr lang="ru-RU" dirty="0"/>
@@ -4413,8 +4926,35 @@
               <a:rPr lang="ru-RU" dirty="0"/>
             </a:br>
             <a:r>
+              <a:rPr lang="ru-RU" b="1" dirty="0" smtClean="0"/>
+              <a:t>😎 </a:t>
+            </a:r>
+            <a:r>
               <a:rPr lang="ru-RU" dirty="0" smtClean="0"/>
-              <a:t>⚙УНИВЕРСАЛЬНОСТЬ</a:t>
+              <a:t>ПРОВЕРКА </a:t>
+            </a:r>
+            <a:r>
+              <a:rPr lang="ru-RU" dirty="0"/>
+              <a:t>ЗНАНИЙ (викторина)</a:t>
+            </a:r>
+            <a:r>
+              <a:rPr lang="ru-RU" dirty="0"/>
+              <a:t/>
+            </a:r>
+            <a:br>
+              <a:rPr lang="ru-RU" dirty="0"/>
+            </a:br>
+            <a:r>
+              <a:rPr lang="ru-RU" dirty="0"/>
+              <a:t>📚 СОЦИАЛЬНАЯ СОСТАВЛЯЮЩАЯ </a:t>
+            </a:r>
+            <a:r>
+              <a:rPr lang="ru-RU" dirty="0" smtClean="0"/>
+              <a:t>(публикация идей </a:t>
+            </a:r>
+            <a:r>
+              <a:rPr lang="ru-RU" dirty="0"/>
+              <a:t>+ избранное)</a:t>
             </a:r>
             <a:endParaRPr lang="ru-RU" dirty="0"/>
           </a:p>
@@ -4422,28 +4962,22 @@
       </p:sp>
       <p:pic>
         <p:nvPicPr>
-          <p:cNvPr id="6" name="Рисунок 5"/>
+          <p:cNvPr id="5" name="Рисунок 4"/>
           <p:cNvPicPr>
             <a:picLocks noChangeAspect="1"/>
           </p:cNvPicPr>
           <p:nvPr/>
         </p:nvPicPr>
         <p:blipFill>
-          <a:blip r:embed="rId2">
-            <a:extLst>
-              <a:ext uri="{28A0092B-C50C-407E-A947-70E740481C1C}">
-                <a14:useLocalDpi xmlns:a14="http://schemas.microsoft.com/office/drawing/2010/main" val="0"/>
-              </a:ext>
-            </a:extLst>
-          </a:blip>
+          <a:blip r:embed="rId2"/>
           <a:stretch>
             <a:fillRect/>
           </a:stretch>
         </p:blipFill>
         <p:spPr>
           <a:xfrm>
-            <a:off x="6120715" y="1809206"/>
-            <a:ext cx="5048794" cy="5048794"/>
+            <a:off x="6120715" y="2479590"/>
+            <a:ext cx="5424897" cy="3484605"/>
           </a:xfrm>
           <a:prstGeom prst="rect">
             <a:avLst/>
@@ -4487,247 +5021,542 @@
           <a:chExt cx="0" cy="0"/>
         </a:xfrm>
       </p:grpSpPr>
-      <p:sp>
-        <p:nvSpPr>
-          <p:cNvPr id="2" name="Заголовок 1"/>
-          <p:cNvSpPr>
-            <a:spLocks noGrp="1"/>
-          </p:cNvSpPr>
-          <p:nvPr>
-            <p:ph type="title"/>
-          </p:nvPr>
-        </p:nvSpPr>
-        <p:spPr/>
-        <p:txBody>
-          <a:bodyPr/>
-          <a:lstStyle/>
-          <a:p>
-            <a:r>
-              <a:rPr lang="ru-RU" dirty="0" smtClean="0"/>
-              <a:t>Технологический стек</a:t>
-            </a:r>
-            <a:endParaRPr lang="ru-RU" dirty="0"/>
-          </a:p>
-        </p:txBody>
-      </p:sp>
-      <p:sp>
-        <p:nvSpPr>
-          <p:cNvPr id="3" name="Объект 2"/>
-          <p:cNvSpPr>
-            <a:spLocks noGrp="1"/>
-          </p:cNvSpPr>
-          <p:nvPr>
-            <p:ph idx="1"/>
-          </p:nvPr>
-        </p:nvSpPr>
-        <p:spPr>
-          <a:xfrm>
-            <a:off x="581192" y="2180496"/>
-            <a:ext cx="4789877" cy="4104974"/>
-          </a:xfrm>
-        </p:spPr>
-        <p:txBody>
-          <a:bodyPr>
-            <a:normAutofit/>
-          </a:bodyPr>
-          <a:lstStyle/>
-          <a:p>
-            <a:r>
-              <a:rPr lang="ru-RU" b="1" dirty="0" err="1" smtClean="0"/>
-              <a:t>Flask</a:t>
-            </a:r>
-            <a:r>
-              <a:rPr lang="ru-RU" b="1" dirty="0" smtClean="0"/>
-              <a:t> </a:t>
-            </a:r>
-            <a:r>
-              <a:rPr lang="ru-RU" b="1" dirty="0"/>
-              <a:t>– </a:t>
-            </a:r>
-            <a:r>
-              <a:rPr lang="ru-RU" dirty="0" err="1" smtClean="0"/>
-              <a:t>микрофреймворк</a:t>
-            </a:r>
-            <a:r>
-              <a:rPr lang="ru-RU" dirty="0" smtClean="0"/>
-              <a:t> для веб-приложений на </a:t>
-            </a:r>
-            <a:r>
-              <a:rPr lang="en-US" dirty="0" smtClean="0">
-                <a:latin typeface="Corbel" panose="020B0503020204020204" pitchFamily="34" charset="0"/>
-              </a:rPr>
-              <a:t>Python</a:t>
-            </a:r>
-            <a:endParaRPr lang="ru-RU" dirty="0" smtClean="0">
-              <a:latin typeface="Corbel" panose="020B0503020204020204" pitchFamily="34" charset="0"/>
-            </a:endParaRPr>
-          </a:p>
-          <a:p>
-            <a:r>
-              <a:rPr lang="en-US" b="1" dirty="0" smtClean="0">
-                <a:latin typeface="Corbel" panose="020B0503020204020204" pitchFamily="34" charset="0"/>
-              </a:rPr>
-              <a:t>random</a:t>
-            </a:r>
-            <a:r>
-              <a:rPr lang="ru-RU" dirty="0" smtClean="0">
-                <a:latin typeface="Corbel" panose="020B0503020204020204" pitchFamily="34" charset="0"/>
-              </a:rPr>
-              <a:t> </a:t>
-            </a:r>
-            <a:r>
-              <a:rPr lang="en-US" dirty="0" smtClean="0">
-                <a:latin typeface="Corbel" panose="020B0503020204020204" pitchFamily="34" charset="0"/>
-              </a:rPr>
-              <a:t> –</a:t>
-            </a:r>
-            <a:r>
-              <a:rPr lang="ru-RU" dirty="0" smtClean="0">
-                <a:latin typeface="Corbel" panose="020B0503020204020204" pitchFamily="34" charset="0"/>
-              </a:rPr>
-              <a:t> библиотека для генерации псевдослучайных чисел на </a:t>
-            </a:r>
-            <a:r>
-              <a:rPr lang="en-US" dirty="0" smtClean="0">
-                <a:latin typeface="Corbel" panose="020B0503020204020204" pitchFamily="34" charset="0"/>
-              </a:rPr>
-              <a:t>Python</a:t>
-            </a:r>
-          </a:p>
-          <a:p>
-            <a:r>
-              <a:rPr lang="en-US" b="1" dirty="0" err="1" smtClean="0">
-                <a:latin typeface="Corbel" panose="020B0503020204020204" pitchFamily="34" charset="0"/>
-              </a:rPr>
-              <a:t>json</a:t>
-            </a:r>
-            <a:r>
-              <a:rPr lang="en-US" dirty="0" smtClean="0">
-                <a:latin typeface="Corbel" panose="020B0503020204020204" pitchFamily="34" charset="0"/>
-              </a:rPr>
-              <a:t> – </a:t>
-            </a:r>
-            <a:r>
-              <a:rPr lang="ru-RU" dirty="0" smtClean="0">
-                <a:latin typeface="Corbel" panose="020B0503020204020204" pitchFamily="34" charset="0"/>
-              </a:rPr>
-              <a:t>библиотека, позволяющая преобразовывать </a:t>
-            </a:r>
-            <a:r>
-              <a:rPr lang="ru-RU" dirty="0" err="1" smtClean="0">
-                <a:latin typeface="Corbel" panose="020B0503020204020204" pitchFamily="34" charset="0"/>
-              </a:rPr>
-              <a:t>обьекты</a:t>
-            </a:r>
-            <a:r>
-              <a:rPr lang="ru-RU" dirty="0" smtClean="0">
-                <a:latin typeface="Corbel" panose="020B0503020204020204" pitchFamily="34" charset="0"/>
-              </a:rPr>
-              <a:t> </a:t>
-            </a:r>
-            <a:r>
-              <a:rPr lang="en-US" dirty="0" smtClean="0">
-                <a:latin typeface="Corbel" panose="020B0503020204020204" pitchFamily="34" charset="0"/>
-              </a:rPr>
-              <a:t>Python </a:t>
-            </a:r>
-            <a:r>
-              <a:rPr lang="ru-RU" dirty="0" smtClean="0">
-                <a:latin typeface="Corbel" panose="020B0503020204020204" pitchFamily="34" charset="0"/>
-              </a:rPr>
-              <a:t>в </a:t>
-            </a:r>
-            <a:r>
-              <a:rPr lang="en-US" dirty="0" smtClean="0">
-                <a:latin typeface="Corbel" panose="020B0503020204020204" pitchFamily="34" charset="0"/>
-              </a:rPr>
-              <a:t>JSON </a:t>
-            </a:r>
-            <a:r>
-              <a:rPr lang="ru-RU" dirty="0" smtClean="0">
-                <a:latin typeface="Corbel" panose="020B0503020204020204" pitchFamily="34" charset="0"/>
-              </a:rPr>
-              <a:t>и обратно</a:t>
-            </a:r>
-          </a:p>
-          <a:p>
-            <a:r>
-              <a:rPr lang="ru-RU" b="1" dirty="0" err="1" smtClean="0"/>
-              <a:t>WTForms</a:t>
-            </a:r>
-            <a:r>
-              <a:rPr lang="ru-RU" b="1" dirty="0" smtClean="0"/>
-              <a:t> </a:t>
-            </a:r>
-            <a:r>
-              <a:rPr lang="ru-RU" b="1" dirty="0"/>
-              <a:t>– </a:t>
-            </a:r>
-            <a:r>
-              <a:rPr lang="ru-RU" dirty="0">
-                <a:latin typeface="Corbel" panose="020B0503020204020204" pitchFamily="34" charset="0"/>
-              </a:rPr>
-              <a:t>библиотека для создания и </a:t>
-            </a:r>
-            <a:r>
-              <a:rPr lang="ru-RU" dirty="0" err="1">
-                <a:latin typeface="Corbel" panose="020B0503020204020204" pitchFamily="34" charset="0"/>
-              </a:rPr>
-              <a:t>валидации</a:t>
-            </a:r>
-            <a:r>
-              <a:rPr lang="ru-RU" dirty="0">
-                <a:latin typeface="Corbel" panose="020B0503020204020204" pitchFamily="34" charset="0"/>
-              </a:rPr>
-              <a:t> веб-форм</a:t>
-            </a:r>
-            <a:endParaRPr lang="en-US" dirty="0" smtClean="0">
-              <a:latin typeface="Corbel" panose="020B0503020204020204" pitchFamily="34" charset="0"/>
-            </a:endParaRPr>
-          </a:p>
-          <a:p>
-            <a:r>
-              <a:rPr lang="ru-RU" b="1" dirty="0" err="1"/>
-              <a:t>SQLAlchemy</a:t>
-            </a:r>
-            <a:r>
-              <a:rPr lang="ru-RU" b="1" dirty="0"/>
-              <a:t> – </a:t>
-            </a:r>
-            <a:r>
-              <a:rPr lang="ru-RU" dirty="0"/>
-              <a:t>инструмент для работы с базами данных через ORM</a:t>
-            </a:r>
-            <a:endParaRPr lang="ru-RU" dirty="0">
-              <a:latin typeface="Corbel" panose="020B0503020204020204" pitchFamily="34" charset="0"/>
-            </a:endParaRPr>
-          </a:p>
-        </p:txBody>
-      </p:sp>
       <p:pic>
         <p:nvPicPr>
-          <p:cNvPr id="4" name="Рисунок 3"/>
+          <p:cNvPr id="12" name="Рисунок 11"/>
           <p:cNvPicPr>
             <a:picLocks noChangeAspect="1"/>
           </p:cNvPicPr>
           <p:nvPr/>
         </p:nvPicPr>
         <p:blipFill>
-          <a:blip r:embed="rId2">
+          <a:blip r:embed="rId2"/>
+          <a:stretch>
+            <a:fillRect/>
+          </a:stretch>
+        </p:blipFill>
+        <p:spPr>
+          <a:xfrm>
+            <a:off x="7635953" y="3571470"/>
+            <a:ext cx="3685563" cy="1571452"/>
+          </a:xfrm>
+          <a:prstGeom prst="rect">
+            <a:avLst/>
+          </a:prstGeom>
+        </p:spPr>
+      </p:pic>
+      <p:sp>
+        <p:nvSpPr>
+          <p:cNvPr id="2" name="Заголовок 1"/>
+          <p:cNvSpPr>
+            <a:spLocks noGrp="1"/>
+          </p:cNvSpPr>
+          <p:nvPr>
+            <p:ph type="title"/>
+          </p:nvPr>
+        </p:nvSpPr>
+        <p:spPr/>
+        <p:txBody>
+          <a:bodyPr/>
+          <a:lstStyle/>
+          <a:p>
+            <a:r>
+              <a:rPr lang="ru-RU" dirty="0" smtClean="0"/>
+              <a:t>Технологический стек</a:t>
+            </a:r>
+            <a:endParaRPr lang="ru-RU" dirty="0"/>
+          </a:p>
+        </p:txBody>
+      </p:sp>
+      <p:sp>
+        <p:nvSpPr>
+          <p:cNvPr id="3" name="Объект 2"/>
+          <p:cNvSpPr>
+            <a:spLocks noGrp="1"/>
+          </p:cNvSpPr>
+          <p:nvPr>
+            <p:ph idx="1"/>
+          </p:nvPr>
+        </p:nvSpPr>
+        <p:spPr>
+          <a:xfrm>
+            <a:off x="542542" y="1985319"/>
+            <a:ext cx="4789877" cy="4872681"/>
+          </a:xfrm>
+        </p:spPr>
+        <p:txBody>
+          <a:bodyPr>
+            <a:normAutofit fontScale="92500" lnSpcReduction="10000"/>
+          </a:bodyPr>
+          <a:lstStyle/>
+          <a:p>
+            <a:r>
+              <a:rPr lang="ru-RU" b="1" dirty="0" err="1" smtClean="0"/>
+              <a:t>Flask</a:t>
+            </a:r>
+            <a:r>
+              <a:rPr lang="ru-RU" b="1" dirty="0" smtClean="0"/>
+              <a:t> </a:t>
+            </a:r>
+            <a:r>
+              <a:rPr lang="ru-RU" b="1" dirty="0"/>
+              <a:t>-</a:t>
+            </a:r>
+            <a:r>
+              <a:rPr lang="ru-RU" b="1" dirty="0" smtClean="0"/>
+              <a:t> </a:t>
+            </a:r>
+            <a:r>
+              <a:rPr lang="ru-RU" dirty="0" err="1"/>
+              <a:t>микрофреймворк</a:t>
+            </a:r>
+            <a:r>
+              <a:rPr lang="ru-RU" dirty="0"/>
+              <a:t> для веб-приложений на </a:t>
+            </a:r>
+            <a:r>
+              <a:rPr lang="en-US" dirty="0">
+                <a:latin typeface="Corbel" panose="020B0503020204020204" pitchFamily="34" charset="0"/>
+              </a:rPr>
+              <a:t>Python</a:t>
+            </a:r>
+            <a:endParaRPr lang="ru-RU" dirty="0"/>
+          </a:p>
+          <a:p>
+            <a:r>
+              <a:rPr lang="en-US" b="1" dirty="0" smtClean="0">
+                <a:latin typeface="Corbel" panose="020B0503020204020204" pitchFamily="34" charset="0"/>
+              </a:rPr>
+              <a:t>random</a:t>
+            </a:r>
+            <a:r>
+              <a:rPr lang="ru-RU" dirty="0" smtClean="0">
+                <a:latin typeface="Corbel" panose="020B0503020204020204" pitchFamily="34" charset="0"/>
+              </a:rPr>
+              <a:t> </a:t>
+            </a:r>
+            <a:r>
+              <a:rPr lang="en-US" dirty="0" smtClean="0">
+                <a:latin typeface="Corbel" panose="020B0503020204020204" pitchFamily="34" charset="0"/>
+              </a:rPr>
+              <a:t> </a:t>
+            </a:r>
+            <a:r>
+              <a:rPr lang="ru-RU" b="1" dirty="0"/>
+              <a:t>-</a:t>
+            </a:r>
+            <a:r>
+              <a:rPr lang="ru-RU" dirty="0" smtClean="0">
+                <a:latin typeface="Corbel" panose="020B0503020204020204" pitchFamily="34" charset="0"/>
+              </a:rPr>
+              <a:t> </a:t>
+            </a:r>
+            <a:r>
+              <a:rPr lang="ru-RU" dirty="0" smtClean="0">
+                <a:latin typeface="Corbel" panose="020B0503020204020204" pitchFamily="34" charset="0"/>
+              </a:rPr>
+              <a:t>библиотека для генерации псевдослучайных чисел на </a:t>
+            </a:r>
+            <a:r>
+              <a:rPr lang="en-US" dirty="0" smtClean="0">
+                <a:latin typeface="Corbel" panose="020B0503020204020204" pitchFamily="34" charset="0"/>
+              </a:rPr>
+              <a:t>Python</a:t>
+            </a:r>
+          </a:p>
+          <a:p>
+            <a:r>
+              <a:rPr lang="en-US" b="1" dirty="0" err="1" smtClean="0">
+                <a:latin typeface="Corbel" panose="020B0503020204020204" pitchFamily="34" charset="0"/>
+              </a:rPr>
+              <a:t>json</a:t>
+            </a:r>
+            <a:r>
+              <a:rPr lang="en-US" dirty="0" smtClean="0">
+                <a:latin typeface="Corbel" panose="020B0503020204020204" pitchFamily="34" charset="0"/>
+              </a:rPr>
+              <a:t> </a:t>
+            </a:r>
+            <a:r>
+              <a:rPr lang="ru-RU" b="1" dirty="0"/>
+              <a:t>-</a:t>
+            </a:r>
+            <a:r>
+              <a:rPr lang="en-US" dirty="0" smtClean="0">
+                <a:latin typeface="Corbel" panose="020B0503020204020204" pitchFamily="34" charset="0"/>
+              </a:rPr>
+              <a:t> </a:t>
+            </a:r>
+            <a:r>
+              <a:rPr lang="ru-RU" dirty="0" smtClean="0">
+                <a:latin typeface="Corbel" panose="020B0503020204020204" pitchFamily="34" charset="0"/>
+              </a:rPr>
+              <a:t>библиотека, позволяющая преобразовывать </a:t>
+            </a:r>
+            <a:r>
+              <a:rPr lang="ru-RU" dirty="0" err="1" smtClean="0">
+                <a:latin typeface="Corbel" panose="020B0503020204020204" pitchFamily="34" charset="0"/>
+              </a:rPr>
+              <a:t>обьекты</a:t>
+            </a:r>
+            <a:r>
+              <a:rPr lang="ru-RU" dirty="0" smtClean="0">
+                <a:latin typeface="Corbel" panose="020B0503020204020204" pitchFamily="34" charset="0"/>
+              </a:rPr>
+              <a:t> </a:t>
+            </a:r>
+            <a:r>
+              <a:rPr lang="en-US" dirty="0" smtClean="0">
+                <a:latin typeface="Corbel" panose="020B0503020204020204" pitchFamily="34" charset="0"/>
+              </a:rPr>
+              <a:t>Python </a:t>
+            </a:r>
+            <a:r>
+              <a:rPr lang="ru-RU" dirty="0" smtClean="0">
+                <a:latin typeface="Corbel" panose="020B0503020204020204" pitchFamily="34" charset="0"/>
+              </a:rPr>
+              <a:t>в </a:t>
+            </a:r>
+            <a:r>
+              <a:rPr lang="en-US" dirty="0" smtClean="0">
+                <a:latin typeface="Corbel" panose="020B0503020204020204" pitchFamily="34" charset="0"/>
+              </a:rPr>
+              <a:t>JSON </a:t>
+            </a:r>
+            <a:r>
+              <a:rPr lang="ru-RU" dirty="0" smtClean="0">
+                <a:latin typeface="Corbel" panose="020B0503020204020204" pitchFamily="34" charset="0"/>
+              </a:rPr>
+              <a:t>и обратно</a:t>
+            </a:r>
+          </a:p>
+          <a:p>
+            <a:r>
+              <a:rPr lang="ru-RU" b="1" dirty="0" err="1" smtClean="0"/>
+              <a:t>WTForms</a:t>
+            </a:r>
+            <a:r>
+              <a:rPr lang="ru-RU" b="1" dirty="0" smtClean="0"/>
+              <a:t> </a:t>
+            </a:r>
+            <a:r>
+              <a:rPr lang="ru-RU" b="1" dirty="0"/>
+              <a:t>- </a:t>
+            </a:r>
+            <a:r>
+              <a:rPr lang="ru-RU" dirty="0">
+                <a:latin typeface="Corbel" panose="020B0503020204020204" pitchFamily="34" charset="0"/>
+              </a:rPr>
+              <a:t>библиотека для создания и </a:t>
+            </a:r>
+            <a:r>
+              <a:rPr lang="ru-RU" dirty="0" err="1">
+                <a:latin typeface="Corbel" panose="020B0503020204020204" pitchFamily="34" charset="0"/>
+              </a:rPr>
+              <a:t>валидации</a:t>
+            </a:r>
+            <a:r>
+              <a:rPr lang="ru-RU" dirty="0">
+                <a:latin typeface="Corbel" panose="020B0503020204020204" pitchFamily="34" charset="0"/>
+              </a:rPr>
+              <a:t> веб-форм</a:t>
+            </a:r>
+            <a:endParaRPr lang="en-US" dirty="0" smtClean="0">
+              <a:latin typeface="Corbel" panose="020B0503020204020204" pitchFamily="34" charset="0"/>
+            </a:endParaRPr>
+          </a:p>
+          <a:p>
+            <a:r>
+              <a:rPr lang="ru-RU" b="1" dirty="0" err="1"/>
+              <a:t>SQLAlchemy</a:t>
+            </a:r>
+            <a:r>
+              <a:rPr lang="ru-RU" b="1" dirty="0"/>
+              <a:t> </a:t>
+            </a:r>
+            <a:r>
+              <a:rPr lang="ru-RU" b="1" dirty="0"/>
+              <a:t>- </a:t>
+            </a:r>
+            <a:r>
+              <a:rPr lang="ru-RU" dirty="0"/>
+              <a:t>инструмент для работы с базами данных через </a:t>
+            </a:r>
+            <a:r>
+              <a:rPr lang="ru-RU" dirty="0" smtClean="0"/>
+              <a:t>ORM</a:t>
+            </a:r>
+          </a:p>
+          <a:p>
+            <a:r>
+              <a:rPr lang="ru-RU" b="1" dirty="0" smtClean="0"/>
+              <a:t>Внешние </a:t>
+            </a:r>
+            <a:r>
+              <a:rPr lang="en-US" b="1" dirty="0"/>
+              <a:t>API </a:t>
+            </a:r>
+            <a:r>
+              <a:rPr lang="en-US" dirty="0"/>
+              <a:t>(</a:t>
+            </a:r>
+            <a:r>
+              <a:rPr lang="en-US" dirty="0" err="1"/>
+              <a:t>TheMealDB</a:t>
+            </a:r>
+            <a:r>
+              <a:rPr lang="en-US" dirty="0"/>
+              <a:t>, </a:t>
+            </a:r>
+            <a:r>
+              <a:rPr lang="en-US" dirty="0" err="1"/>
+              <a:t>JokeAPI</a:t>
+            </a:r>
+            <a:r>
+              <a:rPr lang="en-US" dirty="0"/>
+              <a:t>, </a:t>
+            </a:r>
+            <a:r>
+              <a:rPr lang="en-US" dirty="0" err="1"/>
+              <a:t>AdviceSlip</a:t>
+            </a:r>
+            <a:r>
+              <a:rPr lang="en-US" dirty="0"/>
+              <a:t>, </a:t>
+            </a:r>
+            <a:r>
+              <a:rPr lang="en-US" dirty="0" err="1"/>
+              <a:t>OpenTDB</a:t>
+            </a:r>
+            <a:r>
+              <a:rPr lang="en-US" dirty="0"/>
+              <a:t>, </a:t>
+            </a:r>
+            <a:r>
+              <a:rPr lang="en-US" dirty="0" err="1"/>
+              <a:t>Agify</a:t>
+            </a:r>
+            <a:r>
+              <a:rPr lang="en-US" dirty="0"/>
+              <a:t>, </a:t>
+            </a:r>
+            <a:r>
+              <a:rPr lang="en-US" dirty="0" err="1"/>
+              <a:t>Genderize</a:t>
+            </a:r>
+            <a:r>
+              <a:rPr lang="en-US" dirty="0"/>
+              <a:t>, Nationalize) </a:t>
+            </a:r>
+            <a:r>
+              <a:rPr lang="ru-RU" b="1" dirty="0"/>
+              <a:t>-</a:t>
+            </a:r>
+            <a:r>
+              <a:rPr lang="en-US" dirty="0" smtClean="0"/>
+              <a:t> </a:t>
+            </a:r>
+            <a:r>
+              <a:rPr lang="ru-RU" dirty="0"/>
+              <a:t>живой контент на </a:t>
+            </a:r>
+            <a:r>
+              <a:rPr lang="ru-RU" dirty="0" smtClean="0"/>
+              <a:t>английском</a:t>
+            </a:r>
+          </a:p>
+          <a:p>
+            <a:r>
+              <a:rPr lang="en-US" b="1" dirty="0" smtClean="0"/>
+              <a:t>Bootstrap</a:t>
+            </a:r>
+            <a:r>
+              <a:rPr lang="ru-RU" b="1" dirty="0" smtClean="0"/>
+              <a:t> - </a:t>
+            </a:r>
+            <a:r>
+              <a:rPr lang="ru-RU" dirty="0"/>
+              <a:t>Адаптивный интерфейс, сетка, кнопки, стили</a:t>
+            </a:r>
+            <a:endParaRPr lang="ru-RU" dirty="0"/>
+          </a:p>
+          <a:p>
+            <a:endParaRPr lang="ru-RU" dirty="0">
+              <a:latin typeface="Corbel" panose="020B0503020204020204" pitchFamily="34" charset="0"/>
+            </a:endParaRPr>
+          </a:p>
+        </p:txBody>
+      </p:sp>
+      <p:sp>
+        <p:nvSpPr>
+          <p:cNvPr id="5" name="AutoShape 2" descr="Picture background"/>
+          <p:cNvSpPr>
+            <a:spLocks noChangeAspect="1" noChangeArrowheads="1"/>
+          </p:cNvSpPr>
+          <p:nvPr/>
+        </p:nvSpPr>
+        <p:spPr bwMode="auto">
+          <a:xfrm>
+            <a:off x="155575" y="-144463"/>
+            <a:ext cx="304800" cy="304801"/>
+          </a:xfrm>
+          <a:prstGeom prst="rect">
+            <a:avLst/>
+          </a:prstGeom>
+          <a:noFill/>
+          <a:extLst>
+            <a:ext uri="{909E8E84-426E-40DD-AFC4-6F175D3DCCD1}">
+              <a14:hiddenFill xmlns:a14="http://schemas.microsoft.com/office/drawing/2010/main">
+                <a:solidFill>
+                  <a:srgbClr val="FFFFFF"/>
+                </a:solidFill>
+              </a14:hiddenFill>
+            </a:ext>
+          </a:extLst>
+        </p:spPr>
+        <p:txBody>
+          <a:bodyPr vert="horz" wrap="square" lIns="91440" tIns="45720" rIns="91440" bIns="45720" numCol="1" anchor="t" anchorCtr="0" compatLnSpc="1">
+            <a:prstTxWarp prst="textNoShape">
+              <a:avLst/>
+            </a:prstTxWarp>
+          </a:bodyPr>
+          <a:lstStyle/>
+          <a:p>
+            <a:endParaRPr lang="ru-RU"/>
+          </a:p>
+        </p:txBody>
+      </p:sp>
+      <p:pic>
+        <p:nvPicPr>
+          <p:cNvPr id="9" name="Рисунок 8"/>
+          <p:cNvPicPr>
+            <a:picLocks noChangeAspect="1"/>
+          </p:cNvPicPr>
+          <p:nvPr/>
+        </p:nvPicPr>
+        <p:blipFill>
+          <a:blip r:embed="rId3"/>
+          <a:stretch>
+            <a:fillRect/>
+          </a:stretch>
+        </p:blipFill>
+        <p:spPr>
+          <a:xfrm>
+            <a:off x="5597571" y="2082467"/>
+            <a:ext cx="3381303" cy="1323463"/>
+          </a:xfrm>
+          <a:prstGeom prst="rect">
+            <a:avLst/>
+          </a:prstGeom>
+        </p:spPr>
+      </p:pic>
+      <p:pic>
+        <p:nvPicPr>
+          <p:cNvPr id="3084" name="Picture 12" descr="Picture background"/>
+          <p:cNvPicPr>
+            <a:picLocks noChangeAspect="1" noChangeArrowheads="1"/>
+          </p:cNvPicPr>
+          <p:nvPr/>
+        </p:nvPicPr>
+        <p:blipFill>
+          <a:blip r:embed="rId4">
             <a:extLst>
               <a:ext uri="{28A0092B-C50C-407E-A947-70E740481C1C}">
                 <a14:useLocalDpi xmlns:a14="http://schemas.microsoft.com/office/drawing/2010/main" val="0"/>
               </a:ext>
             </a:extLst>
           </a:blip>
+          <a:srcRect/>
           <a:stretch>
             <a:fillRect/>
           </a:stretch>
         </p:blipFill>
-        <p:spPr>
-          <a:xfrm>
-            <a:off x="5836919" y="1478897"/>
-            <a:ext cx="5508171" cy="5508171"/>
+        <p:spPr bwMode="auto">
+          <a:xfrm>
+            <a:off x="6176412" y="3624558"/>
+            <a:ext cx="1465276" cy="1465276"/>
+          </a:xfrm>
+          <a:prstGeom prst="rect">
+            <a:avLst/>
+          </a:prstGeom>
+          <a:noFill/>
+          <a:extLst>
+            <a:ext uri="{909E8E84-426E-40DD-AFC4-6F175D3DCCD1}">
+              <a14:hiddenFill xmlns:a14="http://schemas.microsoft.com/office/drawing/2010/main">
+                <a:solidFill>
+                  <a:srgbClr val="FFFFFF"/>
+                </a:solidFill>
+              </a14:hiddenFill>
+            </a:ext>
+          </a:extLst>
+        </p:spPr>
+      </p:pic>
+      <p:pic>
+        <p:nvPicPr>
+          <p:cNvPr id="11" name="Рисунок 10"/>
+          <p:cNvPicPr>
+            <a:picLocks noChangeAspect="1"/>
+          </p:cNvPicPr>
+          <p:nvPr/>
+        </p:nvPicPr>
+        <p:blipFill>
+          <a:blip r:embed="rId5"/>
+          <a:stretch>
+            <a:fillRect/>
+          </a:stretch>
+        </p:blipFill>
+        <p:spPr>
+          <a:xfrm>
+            <a:off x="9545722" y="1937571"/>
+            <a:ext cx="1478266" cy="1613253"/>
+          </a:xfrm>
+          <a:prstGeom prst="rect">
+            <a:avLst/>
+          </a:prstGeom>
+        </p:spPr>
+      </p:pic>
+      <p:pic>
+        <p:nvPicPr>
+          <p:cNvPr id="13" name="Рисунок 12"/>
+          <p:cNvPicPr>
+            <a:picLocks noChangeAspect="1"/>
+          </p:cNvPicPr>
+          <p:nvPr/>
+        </p:nvPicPr>
+        <p:blipFill>
+          <a:blip r:embed="rId6"/>
+          <a:stretch>
+            <a:fillRect/>
+          </a:stretch>
+        </p:blipFill>
+        <p:spPr>
+          <a:xfrm>
+            <a:off x="6587759" y="5015811"/>
+            <a:ext cx="1750673" cy="1750673"/>
+          </a:xfrm>
+          <a:prstGeom prst="rect">
+            <a:avLst/>
+          </a:prstGeom>
+        </p:spPr>
+      </p:pic>
+      <p:pic>
+        <p:nvPicPr>
+          <p:cNvPr id="14" name="Рисунок 13"/>
+          <p:cNvPicPr>
+            <a:picLocks noChangeAspect="1"/>
+          </p:cNvPicPr>
+          <p:nvPr/>
+        </p:nvPicPr>
+        <p:blipFill>
+          <a:blip r:embed="rId7"/>
+          <a:stretch>
+            <a:fillRect/>
+          </a:stretch>
+        </p:blipFill>
+        <p:spPr>
+          <a:xfrm>
+            <a:off x="8486913" y="5142922"/>
+            <a:ext cx="1799425" cy="1433917"/>
           </a:xfrm>
           <a:prstGeom prst="rect">
             <a:avLst/>
@@ -4771,110 +5600,6 @@
           <a:chExt cx="0" cy="0"/>
         </a:xfrm>
       </p:grpSpPr>
-      <p:sp>
-        <p:nvSpPr>
-          <p:cNvPr id="2" name="Заголовок 1"/>
-          <p:cNvSpPr>
-            <a:spLocks noGrp="1"/>
-          </p:cNvSpPr>
-          <p:nvPr>
-            <p:ph type="title"/>
-          </p:nvPr>
-        </p:nvSpPr>
-        <p:spPr/>
-        <p:txBody>
-          <a:bodyPr/>
-          <a:lstStyle/>
-          <a:p>
-            <a:r>
-              <a:rPr lang="ru-RU" dirty="0" smtClean="0"/>
-              <a:t>Перспективы развития</a:t>
-            </a:r>
-            <a:endParaRPr lang="ru-RU" dirty="0"/>
-          </a:p>
-        </p:txBody>
-      </p:sp>
-      <p:sp>
-        <p:nvSpPr>
-          <p:cNvPr id="3" name="Объект 2"/>
-          <p:cNvSpPr>
-            <a:spLocks noGrp="1"/>
-          </p:cNvSpPr>
-          <p:nvPr>
-            <p:ph idx="1"/>
-          </p:nvPr>
-        </p:nvSpPr>
-        <p:spPr>
-          <a:xfrm>
-            <a:off x="581192" y="2180496"/>
-            <a:ext cx="11029615" cy="3833126"/>
-          </a:xfrm>
-        </p:spPr>
-        <p:txBody>
-          <a:bodyPr>
-            <a:normAutofit/>
-          </a:bodyPr>
-          <a:lstStyle/>
-          <a:p>
-            <a:r>
-              <a:rPr lang="ru-RU" sz="2000" b="1" dirty="0"/>
-              <a:t>Мобильное приложение — </a:t>
-            </a:r>
-            <a:r>
-              <a:rPr lang="ru-RU" sz="2000" b="1" dirty="0" err="1"/>
-              <a:t>рандомайзер</a:t>
-            </a:r>
-            <a:r>
-              <a:rPr lang="ru-RU" sz="2000" b="1" dirty="0"/>
-              <a:t> в кармане</a:t>
-            </a:r>
-            <a:endParaRPr lang="ru-RU" sz="2000" b="1" dirty="0" smtClean="0"/>
-          </a:p>
-          <a:p>
-            <a:r>
-              <a:rPr lang="ru-RU" sz="2000" b="1" dirty="0" smtClean="0"/>
-              <a:t>Перевод интерфейса на другие языки</a:t>
-            </a:r>
-            <a:endParaRPr lang="ru-RU" sz="2000" dirty="0" smtClean="0"/>
-          </a:p>
-          <a:p>
-            <a:r>
-              <a:rPr lang="ru-RU" sz="2000" b="1" dirty="0" smtClean="0"/>
-              <a:t>Добавление </a:t>
-            </a:r>
-            <a:r>
-              <a:rPr lang="ru-RU" sz="2000" b="1" dirty="0" err="1" smtClean="0"/>
-              <a:t>кастомных</a:t>
-            </a:r>
-            <a:r>
-              <a:rPr lang="ru-RU" sz="2000" b="1" dirty="0" smtClean="0"/>
-              <a:t> тем оформления</a:t>
-            </a:r>
-            <a:endParaRPr lang="ru-RU" sz="2000" dirty="0"/>
-          </a:p>
-          <a:p>
-            <a:r>
-              <a:rPr lang="ru-RU" sz="2000" b="1" dirty="0" err="1"/>
-              <a:t>Шеринг</a:t>
-            </a:r>
-            <a:r>
-              <a:rPr lang="ru-RU" sz="2000" b="1" dirty="0"/>
-              <a:t> </a:t>
-            </a:r>
-            <a:r>
-              <a:rPr lang="ru-RU" sz="2000" b="1" dirty="0" smtClean="0"/>
-              <a:t>результатов</a:t>
-            </a:r>
-          </a:p>
-          <a:p>
-            <a:r>
-              <a:rPr lang="ru-RU" sz="2000" b="1" dirty="0" smtClean="0"/>
-              <a:t>Офлайн-режим</a:t>
-            </a:r>
-            <a:endParaRPr lang="ru-RU" sz="2000" dirty="0"/>
-          </a:p>
-        </p:txBody>
-      </p:sp>
       <p:pic>
         <p:nvPicPr>
           <p:cNvPr id="4" name="Рисунок 3"/>
@@ -4897,7 +5622,7 @@
         </p:blipFill>
         <p:spPr>
           <a:xfrm>
-            <a:off x="7415453" y="1898469"/>
+            <a:off x="6682286" y="1832566"/>
             <a:ext cx="4670736" cy="4670736"/>
           </a:xfrm>
           <a:prstGeom prst="rect">
@@ -4905,6 +5630,114 @@
           </a:prstGeom>
         </p:spPr>
       </p:pic>
+      <p:sp>
+        <p:nvSpPr>
+          <p:cNvPr id="2" name="Заголовок 1"/>
+          <p:cNvSpPr>
+            <a:spLocks noGrp="1"/>
+          </p:cNvSpPr>
+          <p:nvPr>
+            <p:ph type="title"/>
+          </p:nvPr>
+        </p:nvSpPr>
+        <p:spPr/>
+        <p:txBody>
+          <a:bodyPr/>
+          <a:lstStyle/>
+          <a:p>
+            <a:r>
+              <a:rPr lang="ru-RU" dirty="0" smtClean="0"/>
+              <a:t>Перспективы развития</a:t>
+            </a:r>
+            <a:endParaRPr lang="ru-RU" dirty="0"/>
+          </a:p>
+        </p:txBody>
+      </p:sp>
+      <p:sp>
+        <p:nvSpPr>
+          <p:cNvPr id="3" name="Объект 2"/>
+          <p:cNvSpPr>
+            <a:spLocks noGrp="1"/>
+          </p:cNvSpPr>
+          <p:nvPr>
+            <p:ph idx="1"/>
+          </p:nvPr>
+        </p:nvSpPr>
+        <p:spPr>
+          <a:xfrm>
+            <a:off x="581192" y="2180496"/>
+            <a:ext cx="11029615" cy="3833126"/>
+          </a:xfrm>
+        </p:spPr>
+        <p:txBody>
+          <a:bodyPr>
+            <a:normAutofit/>
+          </a:bodyPr>
+          <a:lstStyle/>
+          <a:p>
+            <a:r>
+              <a:rPr lang="ru-RU" sz="2000" b="1" dirty="0"/>
+              <a:t>📱 Мобильное приложение — английский в кармане</a:t>
+            </a:r>
+          </a:p>
+          <a:p>
+            <a:r>
+              <a:rPr lang="ru-RU" sz="2000" b="1" dirty="0"/>
+              <a:t>🌍 Перевод интерфейса на другие языки</a:t>
+            </a:r>
+          </a:p>
+          <a:p>
+            <a:r>
+              <a:rPr lang="ru-RU" sz="2000" b="1" dirty="0"/>
+              <a:t>🎨 </a:t>
+            </a:r>
+            <a:r>
+              <a:rPr lang="ru-RU" sz="2000" b="1" dirty="0" err="1"/>
+              <a:t>Кастомные</a:t>
+            </a:r>
+            <a:r>
+              <a:rPr lang="ru-RU" sz="2000" b="1" dirty="0"/>
+              <a:t> темы оформления</a:t>
+            </a:r>
+          </a:p>
+          <a:p>
+            <a:r>
+              <a:rPr lang="ru-RU" sz="2000" b="1" dirty="0"/>
+              <a:t>📤 </a:t>
+            </a:r>
+            <a:r>
+              <a:rPr lang="ru-RU" sz="2000" b="1" dirty="0" err="1"/>
+              <a:t>Шеринг</a:t>
+            </a:r>
+            <a:r>
+              <a:rPr lang="ru-RU" sz="2000" b="1" dirty="0"/>
+              <a:t> результатов в </a:t>
+            </a:r>
+            <a:r>
+              <a:rPr lang="ru-RU" sz="2000" b="1" dirty="0" err="1"/>
+              <a:t>соцсетях</a:t>
+            </a:r>
+            <a:endParaRPr lang="ru-RU" sz="2000" b="1" dirty="0"/>
+          </a:p>
+          <a:p>
+            <a:r>
+              <a:rPr lang="ru-RU" sz="2000" b="1" dirty="0"/>
+              <a:t>📴 Офлайн-режим</a:t>
+            </a:r>
+          </a:p>
+          <a:p>
+            <a:r>
+              <a:rPr lang="ru-RU" sz="2000" b="1" dirty="0" smtClean="0"/>
+              <a:t>🏫 </a:t>
+            </a:r>
+            <a:r>
+              <a:rPr lang="ru-RU" sz="2000" b="1" dirty="0"/>
+              <a:t>Режим «учитель» — идеи для уроков английского</a:t>
+            </a:r>
+            <a:endParaRPr lang="ru-RU" sz="2000" dirty="0"/>
+          </a:p>
+        </p:txBody>
+      </p:sp>
     </p:spTree>
     <p:extLst>
       <p:ext uri="{BB962C8B-B14F-4D97-AF65-F5344CB8AC3E}">
@@ -4959,6 +5792,78 @@
           <a:p>
             <a:r>
               <a:rPr lang="ru-RU" dirty="0" smtClean="0"/>
+              <a:t>ДЕМОНСТРАЦИЯ</a:t>
+            </a:r>
+            <a:endParaRPr lang="ru-RU" dirty="0"/>
+          </a:p>
+        </p:txBody>
+      </p:sp>
+      <p:sp>
+        <p:nvSpPr>
+          <p:cNvPr id="3" name="Объект 2"/>
+          <p:cNvSpPr>
+            <a:spLocks noGrp="1"/>
+          </p:cNvSpPr>
+          <p:nvPr>
+            <p:ph idx="1"/>
+          </p:nvPr>
+        </p:nvSpPr>
+        <p:spPr/>
+        <p:txBody>
+          <a:bodyPr/>
+          <a:lstStyle/>
+          <a:p>
+            <a:endParaRPr lang="ru-RU"/>
+          </a:p>
+        </p:txBody>
+      </p:sp>
+    </p:spTree>
+    <p:extLst>
+      <p:ext uri="{BB962C8B-B14F-4D97-AF65-F5344CB8AC3E}">
+        <p14:creationId xmlns:p14="http://schemas.microsoft.com/office/powerpoint/2010/main" val="512959924"/>
+      </p:ext>
+    </p:extLst>
+  </p:cSld>
+  <p:clrMapOvr>
+    <a:masterClrMapping/>
+  </p:clrMapOvr>
+</p:sld>
+</file>
+
+<file path=ppt/slides/slide7.xml><?xml version="1.0" encoding="utf-8"?>
+<p:sld xmlns:a="http://schemas.openxmlformats.org/drawingml/2006/main" xmlns:r="http://schemas.openxmlformats.org/officeDocument/2006/relationships" xmlns:p="http://schemas.openxmlformats.org/presentationml/2006/main">
+  <p:cSld>
+    <p:spTree>
+      <p:nvGrpSpPr>
+        <p:cNvPr id="1" name=""/>
+        <p:cNvGrpSpPr/>
+        <p:nvPr/>
+      </p:nvGrpSpPr>
+      <p:grpSpPr>
+        <a:xfrm>
+          <a:off x="0" y="0"/>
+          <a:ext cx="0" cy="0"/>
+          <a:chOff x="0" y="0"/>
+          <a:chExt cx="0" cy="0"/>
+        </a:xfrm>
+      </p:grpSpPr>
+      <p:sp>
+        <p:nvSpPr>
+          <p:cNvPr id="2" name="Заголовок 1"/>
+          <p:cNvSpPr>
+            <a:spLocks noGrp="1"/>
+          </p:cNvSpPr>
+          <p:nvPr>
+            <p:ph type="title"/>
+          </p:nvPr>
+        </p:nvSpPr>
+        <p:spPr/>
+        <p:txBody>
+          <a:bodyPr/>
+          <a:lstStyle/>
+          <a:p>
+            <a:r>
+              <a:rPr lang="ru-RU" dirty="0" smtClean="0"/>
               <a:t>Спасибо за внимание!</a:t>
             </a:r>
             <a:endParaRPr lang="ru-RU" dirty="0"/>
@@ -5053,22 +5958,22 @@
         <a:srgbClr val="EBEBEB"/>
       </a:lt2>
       <a:accent1>
-        <a:srgbClr val="1A3260"/>
+        <a:srgbClr val="366658"/>
       </a:accent1>
       <a:accent2>
-        <a:srgbClr val="4590B8"/>
+        <a:srgbClr val="8CB64A"/>
       </a:accent2>
       <a:accent3>
-        <a:srgbClr val="45CBE8"/>
+        <a:srgbClr val="88D5A9"/>
       </a:accent3>
       <a:accent4>
         <a:srgbClr val="969FA7"/>
       </a:accent4>
       <a:accent5>
-        <a:srgbClr val="A2C777"/>
+        <a:srgbClr val="E8A844"/>
       </a:accent5>
       <a:accent6>
-        <a:srgbClr val="42955F"/>
+        <a:srgbClr val="A1561F"/>
       </a:accent6>
       <a:hlink>
         <a:srgbClr val="828282"/>
@@ -5299,7 +6204,7 @@
   <a:extraClrSchemeLst/>
   <a:extLst>
     <a:ext uri="{05A4C25C-085E-4340-85A3-A5531E510DB2}">
-      <thm15:themeFamily xmlns:thm15="http://schemas.microsoft.com/office/thememl/2012/main" name="Dividend" id="{9697A71B-4AB7-4A1A-BD5B-BB2D22835B57}" vid="{66F1C100-1D2B-4BEA-AD01-C4F230B3B965}"/>
+      <thm15:themeFamily xmlns:thm15="http://schemas.microsoft.com/office/thememl/2012/main" name="Dividend" id="{9697A71B-4AB7-4A1A-BD5B-BB2D22835B57}" vid="{4BEC0EAF-CF86-4D49-B83B-56CC62D3CFF1}"/>
     </a:ext>
   </a:extLst>
 </a:theme>
